--- a/SchulungsUnterlagen/HWZ/WerBinIch.pptx
+++ b/SchulungsUnterlagen/HWZ/WerBinIch.pptx
@@ -14423,7 +14423,7 @@
         <p:spPr bwMode="auto">
           <a:xfrm>
             <a:off x="2191566" y="5304208"/>
-            <a:ext cx="6712222" cy="1477328"/>
+            <a:ext cx="4801379" cy="1477328"/>
           </a:xfrm>
           <a:prstGeom prst="rect">
             <a:avLst/>
@@ -14615,39 +14615,7 @@
             </a:r>
             <a:r>
               <a:rPr lang="en-US" altLang="de-DE" sz="1800" dirty="0"/>
-              <a:t> </a:t>
-            </a:r>
-            <a:r>
-              <a:rPr lang="en-US" altLang="de-DE" sz="1800" dirty="0" err="1"/>
-              <a:t>mbA</a:t>
-            </a:r>
-            <a:r>
-              <a:rPr lang="en-US" altLang="de-DE" sz="1800" dirty="0"/>
-              <a:t> an BZU (</a:t>
-            </a:r>
-            <a:r>
-              <a:rPr lang="en-US" altLang="de-DE" sz="1800" dirty="0" err="1"/>
-              <a:t>IoT</a:t>
-            </a:r>
-            <a:r>
-              <a:rPr lang="en-US" altLang="de-DE" sz="1800" dirty="0"/>
-              <a:t>, Python, </a:t>
-            </a:r>
-            <a:r>
-              <a:rPr lang="en-US" altLang="de-DE" sz="1800" dirty="0" err="1"/>
-              <a:t>MySql</a:t>
-            </a:r>
-            <a:r>
-              <a:rPr lang="en-US" altLang="de-DE" sz="1800" dirty="0"/>
-              <a:t>, </a:t>
-            </a:r>
-            <a:r>
-              <a:rPr lang="en-US" altLang="de-DE" sz="1800" dirty="0" err="1"/>
-              <a:t>Rpi</a:t>
-            </a:r>
-            <a:r>
-              <a:rPr lang="en-US" altLang="de-DE" sz="1800" dirty="0"/>
-              <a:t>, REST)</a:t>
+              <a:t> BSFH</a:t>
             </a:r>
           </a:p>
           <a:p>
@@ -14709,7 +14677,7 @@
       </p:sp>
       <p:sp>
         <p:nvSpPr>
-          <p:cNvPr id="35858" name="Text Box 18"/>
+          <p:cNvPr id="35859" name="Text Box 19"/>
           <p:cNvSpPr txBox="1">
             <a:spLocks noChangeArrowheads="1"/>
           </p:cNvSpPr>
@@ -14717,8 +14685,8 @@
         </p:nvSpPr>
         <p:spPr bwMode="auto">
           <a:xfrm>
-            <a:off x="72323" y="3411389"/>
-            <a:ext cx="2018501" cy="2031325"/>
+            <a:off x="4363344" y="1840630"/>
+            <a:ext cx="3051861" cy="1477328"/>
           </a:xfrm>
           <a:prstGeom prst="rect">
             <a:avLst/>
@@ -14893,7 +14861,7 @@
             </a:pPr>
             <a:r>
               <a:rPr lang="de-CH" altLang="de-DE" sz="1800" u="sng" dirty="0"/>
-              <a:t>Freizeit</a:t>
+              <a:t>Details</a:t>
             </a:r>
           </a:p>
           <a:p>
@@ -14905,8 +14873,8 @@
               <a:buNone/>
             </a:pPr>
             <a:r>
-              <a:rPr lang="de-CH" altLang="de-DE" sz="1800" dirty="0"/>
-              <a:t>Familie</a:t>
+              <a:rPr lang="en-US" altLang="de-DE" sz="1800" dirty="0"/>
+              <a:t>Peterliwiese 33</a:t>
             </a:r>
           </a:p>
           <a:p>
@@ -14918,313 +14886,8 @@
               <a:buNone/>
             </a:pPr>
             <a:r>
-              <a:rPr lang="de-CH" altLang="de-DE" sz="1800" dirty="0"/>
-              <a:t>Sport </a:t>
-            </a:r>
-            <a:r>
-              <a:rPr lang="de-CH" altLang="de-DE" sz="1000" dirty="0"/>
-              <a:t>(Outdoor)</a:t>
-            </a:r>
-          </a:p>
-          <a:p>
-            <a:pPr eaLnBrk="1" hangingPunct="1">
-              <a:spcBef>
-                <a:spcPct val="0"/>
-              </a:spcBef>
-              <a:buFontTx/>
-              <a:buNone/>
-            </a:pPr>
-            <a:r>
-              <a:rPr lang="en-US" altLang="de-DE" sz="1800" dirty="0" err="1"/>
-              <a:t>Lastwagen</a:t>
-            </a:r>
-            <a:r>
-              <a:rPr lang="en-US" altLang="de-DE" sz="1800" dirty="0"/>
-              <a:t> </a:t>
-            </a:r>
-            <a:r>
-              <a:rPr lang="en-US" altLang="de-DE" sz="1800" dirty="0" err="1"/>
-              <a:t>fahren</a:t>
-            </a:r>
-            <a:endParaRPr lang="de-CH" altLang="de-DE" sz="1000" dirty="0"/>
-          </a:p>
-          <a:p>
-            <a:pPr eaLnBrk="1" hangingPunct="1">
-              <a:spcBef>
-                <a:spcPct val="0"/>
-              </a:spcBef>
-              <a:buFontTx/>
-              <a:buNone/>
-            </a:pPr>
-            <a:r>
-              <a:rPr lang="en-US" altLang="de-DE" sz="1800" dirty="0" err="1"/>
-              <a:t>Politik</a:t>
-            </a:r>
-            <a:endParaRPr lang="en-US" altLang="de-DE" sz="1800" dirty="0"/>
-          </a:p>
-          <a:p>
-            <a:pPr eaLnBrk="1" hangingPunct="1">
-              <a:spcBef>
-                <a:spcPct val="0"/>
-              </a:spcBef>
-              <a:buFontTx/>
-              <a:buNone/>
-            </a:pPr>
-            <a:r>
-              <a:rPr lang="en-US" altLang="de-DE" sz="1800" dirty="0"/>
-              <a:t>(</a:t>
-            </a:r>
-            <a:r>
-              <a:rPr lang="en-US" altLang="de-DE" sz="1800" dirty="0" err="1"/>
-              <a:t>Militär</a:t>
-            </a:r>
-            <a:r>
-              <a:rPr lang="en-US" altLang="de-DE" sz="1800" dirty="0"/>
-              <a:t>)</a:t>
-            </a:r>
-          </a:p>
-          <a:p>
-            <a:pPr eaLnBrk="1" hangingPunct="1">
-              <a:spcBef>
-                <a:spcPct val="0"/>
-              </a:spcBef>
-              <a:buFontTx/>
-              <a:buNone/>
-            </a:pPr>
-            <a:r>
-              <a:rPr lang="en-US" altLang="de-DE" sz="1800"/>
-              <a:t>Werken</a:t>
-            </a:r>
-            <a:endParaRPr lang="en-US" altLang="de-DE" sz="1800" dirty="0"/>
-          </a:p>
-        </p:txBody>
-      </p:sp>
-      <p:sp>
-        <p:nvSpPr>
-          <p:cNvPr id="35859" name="Text Box 19"/>
-          <p:cNvSpPr txBox="1">
-            <a:spLocks noChangeArrowheads="1"/>
-          </p:cNvSpPr>
-          <p:nvPr/>
-        </p:nvSpPr>
-        <p:spPr bwMode="auto">
-          <a:xfrm>
-            <a:off x="4363344" y="1840630"/>
-            <a:ext cx="3032125" cy="1739900"/>
-          </a:xfrm>
-          <a:prstGeom prst="rect">
-            <a:avLst/>
-          </a:prstGeom>
-          <a:noFill/>
-          <a:ln>
-            <a:noFill/>
-          </a:ln>
-          <a:effectLst/>
-          <a:extLst>
-            <a:ext uri="{909E8E84-426E-40DD-AFC4-6F175D3DCCD1}">
-              <a14:hiddenFill xmlns:a14="http://schemas.microsoft.com/office/drawing/2010/main">
-                <a:solidFill>
-                  <a:schemeClr val="accent1"/>
-                </a:solidFill>
-              </a14:hiddenFill>
-            </a:ext>
-            <a:ext uri="{91240B29-F687-4F45-9708-019B960494DF}">
-              <a14:hiddenLine xmlns:a14="http://schemas.microsoft.com/office/drawing/2010/main" w="9525">
-                <a:solidFill>
-                  <a:schemeClr val="tx1"/>
-                </a:solidFill>
-                <a:miter lim="800000"/>
-                <a:headEnd/>
-                <a:tailEnd/>
-              </a14:hiddenLine>
-            </a:ext>
-            <a:ext uri="{AF507438-7753-43E0-B8FC-AC1667EBCBE1}">
-              <a14:hiddenEffects xmlns:a14="http://schemas.microsoft.com/office/drawing/2010/main">
-                <a:effectLst>
-                  <a:outerShdw dist="35921" dir="2700000" algn="ctr" rotWithShape="0">
-                    <a:schemeClr val="bg2"/>
-                  </a:outerShdw>
-                </a:effectLst>
-              </a14:hiddenEffects>
-            </a:ext>
-          </a:extLst>
-        </p:spPr>
-        <p:txBody>
-          <a:bodyPr wrap="none">
-            <a:spAutoFit/>
-          </a:bodyPr>
-          <a:lstStyle>
-            <a:lvl1pPr>
-              <a:spcBef>
-                <a:spcPct val="20000"/>
-              </a:spcBef>
-              <a:buChar char="•"/>
-              <a:defRPr sz="3200">
-                <a:solidFill>
-                  <a:schemeClr val="tx1"/>
-                </a:solidFill>
-                <a:latin typeface="Arial" panose="020B0604020202020204" pitchFamily="34" charset="0"/>
-              </a:defRPr>
-            </a:lvl1pPr>
-            <a:lvl2pPr marL="742950" indent="-285750">
-              <a:spcBef>
-                <a:spcPct val="20000"/>
-              </a:spcBef>
-              <a:buChar char="–"/>
-              <a:defRPr sz="2800">
-                <a:solidFill>
-                  <a:schemeClr val="tx1"/>
-                </a:solidFill>
-                <a:latin typeface="Arial" panose="020B0604020202020204" pitchFamily="34" charset="0"/>
-              </a:defRPr>
-            </a:lvl2pPr>
-            <a:lvl3pPr marL="1143000" indent="-228600">
-              <a:spcBef>
-                <a:spcPct val="20000"/>
-              </a:spcBef>
-              <a:buChar char="•"/>
-              <a:defRPr sz="2400">
-                <a:solidFill>
-                  <a:schemeClr val="tx1"/>
-                </a:solidFill>
-                <a:latin typeface="Arial" panose="020B0604020202020204" pitchFamily="34" charset="0"/>
-              </a:defRPr>
-            </a:lvl3pPr>
-            <a:lvl4pPr marL="1600200" indent="-228600">
-              <a:spcBef>
-                <a:spcPct val="20000"/>
-              </a:spcBef>
-              <a:buChar char="–"/>
-              <a:defRPr sz="2000">
-                <a:solidFill>
-                  <a:schemeClr val="tx1"/>
-                </a:solidFill>
-                <a:latin typeface="Arial" panose="020B0604020202020204" pitchFamily="34" charset="0"/>
-              </a:defRPr>
-            </a:lvl4pPr>
-            <a:lvl5pPr marL="2057400" indent="-228600">
-              <a:spcBef>
-                <a:spcPct val="20000"/>
-              </a:spcBef>
-              <a:buChar char="»"/>
-              <a:defRPr sz="2000">
-                <a:solidFill>
-                  <a:schemeClr val="tx1"/>
-                </a:solidFill>
-                <a:latin typeface="Arial" panose="020B0604020202020204" pitchFamily="34" charset="0"/>
-              </a:defRPr>
-            </a:lvl5pPr>
-            <a:lvl6pPr marL="2514600" indent="-228600" eaLnBrk="0" fontAlgn="base" hangingPunct="0">
-              <a:spcBef>
-                <a:spcPct val="20000"/>
-              </a:spcBef>
-              <a:spcAft>
-                <a:spcPct val="0"/>
-              </a:spcAft>
-              <a:buChar char="»"/>
-              <a:defRPr sz="2000">
-                <a:solidFill>
-                  <a:schemeClr val="tx1"/>
-                </a:solidFill>
-                <a:latin typeface="Arial" panose="020B0604020202020204" pitchFamily="34" charset="0"/>
-              </a:defRPr>
-            </a:lvl6pPr>
-            <a:lvl7pPr marL="2971800" indent="-228600" eaLnBrk="0" fontAlgn="base" hangingPunct="0">
-              <a:spcBef>
-                <a:spcPct val="20000"/>
-              </a:spcBef>
-              <a:spcAft>
-                <a:spcPct val="0"/>
-              </a:spcAft>
-              <a:buChar char="»"/>
-              <a:defRPr sz="2000">
-                <a:solidFill>
-                  <a:schemeClr val="tx1"/>
-                </a:solidFill>
-                <a:latin typeface="Arial" panose="020B0604020202020204" pitchFamily="34" charset="0"/>
-              </a:defRPr>
-            </a:lvl7pPr>
-            <a:lvl8pPr marL="3429000" indent="-228600" eaLnBrk="0" fontAlgn="base" hangingPunct="0">
-              <a:spcBef>
-                <a:spcPct val="20000"/>
-              </a:spcBef>
-              <a:spcAft>
-                <a:spcPct val="0"/>
-              </a:spcAft>
-              <a:buChar char="»"/>
-              <a:defRPr sz="2000">
-                <a:solidFill>
-                  <a:schemeClr val="tx1"/>
-                </a:solidFill>
-                <a:latin typeface="Arial" panose="020B0604020202020204" pitchFamily="34" charset="0"/>
-              </a:defRPr>
-            </a:lvl8pPr>
-            <a:lvl9pPr marL="3886200" indent="-228600" eaLnBrk="0" fontAlgn="base" hangingPunct="0">
-              <a:spcBef>
-                <a:spcPct val="20000"/>
-              </a:spcBef>
-              <a:spcAft>
-                <a:spcPct val="0"/>
-              </a:spcAft>
-              <a:buChar char="»"/>
-              <a:defRPr sz="2000">
-                <a:solidFill>
-                  <a:schemeClr val="tx1"/>
-                </a:solidFill>
-                <a:latin typeface="Arial" panose="020B0604020202020204" pitchFamily="34" charset="0"/>
-              </a:defRPr>
-            </a:lvl9pPr>
-          </a:lstStyle>
-          <a:p>
-            <a:pPr eaLnBrk="1" hangingPunct="1">
-              <a:spcBef>
-                <a:spcPct val="0"/>
-              </a:spcBef>
-              <a:buFontTx/>
-              <a:buNone/>
-            </a:pPr>
-            <a:r>
-              <a:rPr lang="de-CH" altLang="de-DE" sz="1800" u="sng" dirty="0"/>
-              <a:t>Details</a:t>
-            </a:r>
-          </a:p>
-          <a:p>
-            <a:pPr eaLnBrk="1" hangingPunct="1">
-              <a:spcBef>
-                <a:spcPct val="0"/>
-              </a:spcBef>
-              <a:buFontTx/>
-              <a:buNone/>
-            </a:pPr>
-            <a:r>
-              <a:rPr lang="en-US" altLang="de-DE" sz="1800" dirty="0"/>
-              <a:t>Peterliwiese 33</a:t>
-            </a:r>
-          </a:p>
-          <a:p>
-            <a:pPr eaLnBrk="1" hangingPunct="1">
-              <a:spcBef>
-                <a:spcPct val="0"/>
-              </a:spcBef>
-              <a:buFontTx/>
-              <a:buNone/>
-            </a:pPr>
-            <a:r>
               <a:rPr lang="en-US" altLang="de-DE" sz="1800" dirty="0"/>
               <a:t>CH-8855 Wangen SZ</a:t>
-            </a:r>
-          </a:p>
-          <a:p>
-            <a:pPr eaLnBrk="1" hangingPunct="1">
-              <a:spcBef>
-                <a:spcPct val="0"/>
-              </a:spcBef>
-              <a:buFontTx/>
-              <a:buNone/>
-            </a:pPr>
-            <a:r>
-              <a:rPr lang="en-US" altLang="de-DE" sz="1800" dirty="0"/>
-              <a:t>P: 055 460 14 40</a:t>
             </a:r>
           </a:p>
           <a:p>
@@ -15319,8 +14982,8 @@
         </p:nvSpPr>
         <p:spPr bwMode="auto">
           <a:xfrm>
-            <a:off x="2191566" y="3687949"/>
-            <a:ext cx="6917343" cy="1477328"/>
+            <a:off x="904672" y="3383280"/>
+            <a:ext cx="6917343" cy="2031325"/>
           </a:xfrm>
           <a:prstGeom prst="rect">
             <a:avLst/>
@@ -15561,6 +15224,55 @@
               <a:rPr lang="de-CH" altLang="de-DE" sz="1800" dirty="0"/>
               <a:t>Mehrjährige Auslanderfahrung (New York, London)</a:t>
             </a:r>
+          </a:p>
+          <a:p>
+            <a:pPr eaLnBrk="1" hangingPunct="1">
+              <a:spcBef>
+                <a:spcPct val="0"/>
+              </a:spcBef>
+              <a:buNone/>
+            </a:pPr>
+            <a:r>
+              <a:rPr lang="en-US" altLang="de-DE" sz="1800" dirty="0" err="1"/>
+              <a:t>Berufsschullehrer</a:t>
+            </a:r>
+            <a:r>
+              <a:rPr lang="en-US" altLang="de-DE" sz="1800" dirty="0"/>
+              <a:t> </a:t>
+            </a:r>
+            <a:r>
+              <a:rPr lang="en-US" altLang="de-DE" sz="1800" dirty="0" err="1"/>
+              <a:t>mbA</a:t>
+            </a:r>
+            <a:r>
+              <a:rPr lang="en-US" altLang="de-DE" sz="1800" dirty="0"/>
+              <a:t> an BZU (IoT, Python, </a:t>
+            </a:r>
+            <a:r>
+              <a:rPr lang="en-US" altLang="de-DE" sz="1800" dirty="0" err="1"/>
+              <a:t>MySql</a:t>
+            </a:r>
+            <a:r>
+              <a:rPr lang="en-US" altLang="de-DE" sz="1800" dirty="0"/>
+              <a:t>, </a:t>
+            </a:r>
+            <a:r>
+              <a:rPr lang="en-US" altLang="de-DE" sz="1800" dirty="0" err="1"/>
+              <a:t>Rpi</a:t>
+            </a:r>
+            <a:r>
+              <a:rPr lang="en-US" altLang="de-DE" sz="1800" dirty="0"/>
+              <a:t>, REST)</a:t>
+            </a:r>
+          </a:p>
+          <a:p>
+            <a:pPr eaLnBrk="1" hangingPunct="1">
+              <a:spcBef>
+                <a:spcPct val="0"/>
+              </a:spcBef>
+              <a:buFontTx/>
+              <a:buNone/>
+            </a:pPr>
             <a:endParaRPr lang="en-US" altLang="de-DE" sz="1800" dirty="0"/>
           </a:p>
         </p:txBody>
@@ -15710,7 +15422,7 @@
                                           </p:stCondLst>
                                         </p:cTn>
                                         <p:tgtEl>
-                                          <p:spTgt spid="35858"/>
+                                          <p:spTgt spid="35859"/>
                                         </p:tgtEl>
                                         <p:attrNameLst>
                                           <p:attrName>style.visibility</p:attrName>
@@ -15724,7 +15436,7 @@
                                       <p:cBhvr>
                                         <p:cTn id="17" dur="2000"/>
                                         <p:tgtEl>
-                                          <p:spTgt spid="35858"/>
+                                          <p:spTgt spid="35859"/>
                                         </p:tgtEl>
                                       </p:cBhvr>
                                     </p:animEffect>
@@ -15738,13 +15450,13 @@
                     </p:cTn>
                   </p:par>
                   <p:par>
-                    <p:cTn id="18" fill="hold" nodeType="clickPar">
+                    <p:cTn id="18" fill="hold">
                       <p:stCondLst>
                         <p:cond delay="indefinite"/>
                       </p:stCondLst>
                       <p:childTnLst>
                         <p:par>
-                          <p:cTn id="19" fill="hold" nodeType="withGroup">
+                          <p:cTn id="19" fill="hold">
                             <p:stCondLst>
                               <p:cond delay="0"/>
                             </p:stCondLst>
@@ -15763,7 +15475,7 @@
                                           </p:stCondLst>
                                         </p:cTn>
                                         <p:tgtEl>
-                                          <p:spTgt spid="35859"/>
+                                          <p:spTgt spid="8"/>
                                         </p:tgtEl>
                                         <p:attrNameLst>
                                           <p:attrName>style.visibility</p:attrName>
@@ -15776,59 +15488,6 @@
                                     <p:animEffect transition="in" filter="fade">
                                       <p:cBhvr>
                                         <p:cTn id="22" dur="2000"/>
-                                        <p:tgtEl>
-                                          <p:spTgt spid="35859"/>
-                                        </p:tgtEl>
-                                      </p:cBhvr>
-                                    </p:animEffect>
-                                  </p:childTnLst>
-                                </p:cTn>
-                              </p:par>
-                            </p:childTnLst>
-                          </p:cTn>
-                        </p:par>
-                      </p:childTnLst>
-                    </p:cTn>
-                  </p:par>
-                  <p:par>
-                    <p:cTn id="23" fill="hold">
-                      <p:stCondLst>
-                        <p:cond delay="indefinite"/>
-                      </p:stCondLst>
-                      <p:childTnLst>
-                        <p:par>
-                          <p:cTn id="24" fill="hold">
-                            <p:stCondLst>
-                              <p:cond delay="0"/>
-                            </p:stCondLst>
-                            <p:childTnLst>
-                              <p:par>
-                                <p:cTn id="25" presetID="10" presetClass="entr" presetSubtype="0" fill="hold" grpId="0" nodeType="clickEffect">
-                                  <p:stCondLst>
-                                    <p:cond delay="0"/>
-                                  </p:stCondLst>
-                                  <p:childTnLst>
-                                    <p:set>
-                                      <p:cBhvr>
-                                        <p:cTn id="26" dur="1" fill="hold">
-                                          <p:stCondLst>
-                                            <p:cond delay="0"/>
-                                          </p:stCondLst>
-                                        </p:cTn>
-                                        <p:tgtEl>
-                                          <p:spTgt spid="8"/>
-                                        </p:tgtEl>
-                                        <p:attrNameLst>
-                                          <p:attrName>style.visibility</p:attrName>
-                                        </p:attrNameLst>
-                                      </p:cBhvr>
-                                      <p:to>
-                                        <p:strVal val="visible"/>
-                                      </p:to>
-                                    </p:set>
-                                    <p:animEffect transition="in" filter="fade">
-                                      <p:cBhvr>
-                                        <p:cTn id="27" dur="2000"/>
                                         <p:tgtEl>
                                           <p:spTgt spid="8"/>
                                         </p:tgtEl>
@@ -15867,7 +15526,6 @@
     <p:bldLst>
       <p:bldP spid="35848" grpId="0"/>
       <p:bldP spid="35857" grpId="0"/>
-      <p:bldP spid="35858" grpId="0"/>
       <p:bldP spid="35859" grpId="0"/>
       <p:bldP spid="8" grpId="0"/>
     </p:bldLst>
